--- a/final_deliverables/v6/20261009_最終発表_v6.pptx
+++ b/final_deliverables/v6/20261009_最終発表_v6.pptx
@@ -1810,7 +1810,7 @@
               <c:strCache>
                 <c:ptCount val="1"/>
                 <c:pt idx="0">
-                  <c:v>A案</c:v>
+                  <c:v>A案 予算維持型</c:v>
                 </c:pt>
               </c:strCache>
             </c:strRef>
@@ -1847,13 +1847,13 @@
                 <c:formatCode>General</c:formatCode>
                 <c:ptCount val="3"/>
                 <c:pt idx="0">
-                  <c:v>69</c:v>
+                  <c:v>0.00048149436868272113</c:v>
                 </c:pt>
                 <c:pt idx="1">
-                  <c:v>208</c:v>
+                  <c:v>0.0014444831060481628</c:v>
                 </c:pt>
                 <c:pt idx="2">
-                  <c:v>415</c:v>
+                  <c:v>0.0028889662120963255</c:v>
                 </c:pt>
               </c:numCache>
             </c:numRef>
@@ -1868,7 +1868,7 @@
               <c:strCache>
                 <c:ptCount val="1"/>
                 <c:pt idx="0">
-                  <c:v>B案</c:v>
+                  <c:v>B案 追加投資型</c:v>
                 </c:pt>
               </c:strCache>
             </c:strRef>
@@ -1905,20 +1905,20 @@
                 <c:formatCode>General</c:formatCode>
                 <c:ptCount val="3"/>
                 <c:pt idx="0">
-                  <c:v>183</c:v>
+                  <c:v>0.001302670096700109</c:v>
                 </c:pt>
                 <c:pt idx="1">
-                  <c:v>548</c:v>
+                  <c:v>0.003908010290100326</c:v>
                 </c:pt>
                 <c:pt idx="2">
-                  <c:v>1096</c:v>
+                  <c:v>0.007816020580200651</c:v>
                 </c:pt>
               </c:numCache>
             </c:numRef>
           </c:val>
         </c:ser>
         <c:dLbls>
-          <c:numFmt formatCode="#,##0" sourceLinked="0"/>
+          <c:numFmt formatCode="0.00%" sourceLinked="0"/>
           <c:txPr>
             <a:bodyPr/>
             <a:lstStyle/>
@@ -1981,7 +1981,7 @@
       <c:valAx>
         <c:axId val="-2113994440"/>
         <c:scaling>
-          <c:max val="1300.0"/>
+          <c:max val="0.009"/>
           <c:min val="0.0"/>
         </c:scaling>
         <c:delete/>
@@ -3026,17 +3026,22 @@
           <a:lstStyle/>
           <a:p>
             <a:r>
-              <a:t>[0:55] 売上は2つの方法で示します。方法Aは患者数ベースで、全国の追加処方患者に、仮定の患者単価6,300円をかけました。A案は年69万円から415万円です。</a:t>
-            </a:r>
-          </a:p>
-          <a:p>
-            <a:r>
-              <a:t>方法Bは、50億円に売上増加率を置いた計算例で、0.1%なら500万円です。どちらも仮定にもとづく試算で、効果は実証されていません。</a:t>
-            </a:r>
-          </a:p>
-          <a:p>
-            <a:r>
-              <a:t>そこで、まずA案で既読・理解度・処方率を検証し、その後に追加投資と全国展開を判断することを提案します。以上です。</a:t>
+              <a:t>[0:55] 最後に売上インパクトです。計算は2段階です。</a:t>
+            </a:r>
+          </a:p>
+          <a:p>
+            <a:r>
+              <a:t>まず、回答医師5,000名で、処方患者が何%増えるかを求めました。今の処方患者11,280人に対して、基準ケースでA案は16人、0.14%、B案は44人、0.39%増えます。</a:t>
+            </a:r>
+          </a:p>
+          <a:p>
+            <a:r>
+              <a:t>次に、この増加率を薬剤Aの年間売上50億円に当てはめます。A案は年722万円、B案は年1,954万円です。転換率の仮定によって、A案は241万円から1,444万円、B案は651万円から3,908万円の幅があります。</a:t>
+            </a:r>
+          </a:p>
+          <a:p>
+            <a:r>
+              <a:t>仮定にもとづく試算のため、まずA案で既読・理解度・処方率を検証し、その後に追加投資と全国展開を判断することを提案します。以上です。</a:t>
             </a:r>
           </a:p>
         </p:txBody>
@@ -10310,7 +10315,7 @@
                 </a:solidFill>
                 <a:latin typeface="Meiryo"/>
               </a:rPr>
-              <a:t>A案の全国の追加売上は年69〜415万円(試算)。</a:t>
+              <a:t>A案は売上を+0.14%(年722万円)、</a:t>
             </a:r>
           </a:p>
           <a:p>
@@ -10322,7 +10327,7 @@
                 </a:solidFill>
                 <a:latin typeface="Meiryo"/>
               </a:rPr>
-              <a:t>まずA案で効果を検証してから広げる</a:t>
+              <a:t>B案は+0.39%(年1,954万円)押し上げる(基準・試算)</a:t>
             </a:r>
           </a:p>
         </p:txBody>
@@ -10422,7 +10427,7 @@
                 </a:solidFill>
                 <a:latin typeface="Meiryo"/>
               </a:rPr>
-              <a:t>方法A: 全国の追加処方患者 × 患者単価6,300円/年(仮定: 70円/日×90日)。転換率1・3・6%は仮定。方法B: 計算例。どちらも因果効果ではない。</a:t>
+              <a:t>増加率 = 回答医師の追加処方患者 ÷ 処方患者11,280人。× 年間売上50億円(1回のみ)。回答医師が市場と同じ構成と仮定。転換率は仮定で因果効果ではない。</a:t>
             </a:r>
           </a:p>
         </p:txBody>
@@ -10496,7 +10501,7 @@
                 </a:solidFill>
                 <a:latin typeface="Meiryo"/>
               </a:rPr>
-              <a:t>方法A 患者数ベース: 全国の追加売上(年、万円)</a:t>
+              <a:t>売上の増加率(年、市場全体50億円に対して)</a:t>
             </a:r>
           </a:p>
         </p:txBody>
@@ -10534,7 +10539,7 @@
             <a:avLst/>
           </a:prstGeom>
           <a:solidFill>
-            <a:srgbClr val="F1F4F9"/>
+            <a:srgbClr val="FFF4EE"/>
           </a:solidFill>
           <a:ln>
             <a:noFill/>
@@ -10564,7 +10569,7 @@
             <a:avLst/>
           </a:prstGeom>
           <a:solidFill>
-            <a:srgbClr val="0B2A5B"/>
+            <a:srgbClr val="E8602C"/>
           </a:solidFill>
           <a:ln>
             <a:noFill/>
@@ -10587,8 +10592,8 @@
         </p:nvSpPr>
         <p:spPr>
           <a:xfrm>
-            <a:off x="8001000" y="1508760"/>
-            <a:ext cx="3547872" cy="457200"/>
+            <a:off x="8001000" y="1481328"/>
+            <a:ext cx="3547872" cy="411480"/>
           </a:xfrm>
           <a:prstGeom prst="rect">
             <a:avLst/>
@@ -10611,7 +10616,7 @@
                 </a:solidFill>
                 <a:latin typeface="Meiryo"/>
               </a:rPr>
-              <a:t>方法B 売上増加率ベース(計算例)</a:t>
+              <a:t>計算の流れ(基準)</a:t>
             </a:r>
           </a:p>
         </p:txBody>
@@ -10624,8 +10629,8 @@
         </p:nvSpPr>
         <p:spPr>
           <a:xfrm>
-            <a:off x="8001000" y="2057400"/>
-            <a:ext cx="1371600" cy="502920"/>
+            <a:off x="8001000" y="1938528"/>
+            <a:ext cx="3547872" cy="822960"/>
           </a:xfrm>
           <a:prstGeom prst="rect">
             <a:avLst/>
@@ -10637,18 +10642,38 @@
           <a:effectLst/>
         </p:spPr>
         <p:txBody>
-          <a:bodyPr rtlCol="0" anchor="ctr" wrap="square"/>
-          <a:lstStyle/>
-          <a:p>
-            <a:pPr algn="l"/>
-            <a:r>
-              <a:rPr sz="2000" b="1">
-                <a:solidFill>
-                  <a:srgbClr val="E8602C"/>
+          <a:bodyPr rtlCol="0" anchor="t" wrap="square"/>
+          <a:lstStyle/>
+          <a:p>
+            <a:pPr algn="l">
+              <a:spcAft>
+                <a:spcPts val="200"/>
+              </a:spcAft>
+            </a:pPr>
+            <a:r>
+              <a:rPr sz="1250" b="0">
+                <a:solidFill>
+                  <a:srgbClr val="5F6B7A"/>
                 </a:solidFill>
                 <a:latin typeface="Meiryo"/>
               </a:rPr>
-              <a:t>+0.1%</a:t>
+              <a:t>① 回答医師で増える処方患者</a:t>
+            </a:r>
+          </a:p>
+          <a:p>
+            <a:pPr algn="l">
+              <a:spcAft>
+                <a:spcPts val="200"/>
+              </a:spcAft>
+            </a:pPr>
+            <a:r>
+              <a:rPr sz="1550" b="1">
+                <a:solidFill>
+                  <a:srgbClr val="1B1B1B"/>
+                </a:solidFill>
+                <a:latin typeface="Meiryo"/>
+              </a:rPr>
+              <a:t>A案 +16人 / B案 +44人</a:t>
             </a:r>
           </a:p>
         </p:txBody>
@@ -10661,8 +10686,8 @@
         </p:nvSpPr>
         <p:spPr>
           <a:xfrm>
-            <a:off x="9372600" y="2057400"/>
-            <a:ext cx="2103120" cy="502920"/>
+            <a:off x="8001000" y="2807208"/>
+            <a:ext cx="3547872" cy="822960"/>
           </a:xfrm>
           <a:prstGeom prst="rect">
             <a:avLst/>
@@ -10674,18 +10699,38 @@
           <a:effectLst/>
         </p:spPr>
         <p:txBody>
-          <a:bodyPr rtlCol="0" anchor="ctr" wrap="square"/>
-          <a:lstStyle/>
-          <a:p>
-            <a:pPr algn="l"/>
-            <a:r>
-              <a:rPr sz="2000" b="1">
+          <a:bodyPr rtlCol="0" anchor="t" wrap="square"/>
+          <a:lstStyle/>
+          <a:p>
+            <a:pPr algn="l">
+              <a:spcAft>
+                <a:spcPts val="200"/>
+              </a:spcAft>
+            </a:pPr>
+            <a:r>
+              <a:rPr sz="1250" b="0">
+                <a:solidFill>
+                  <a:srgbClr val="5F6B7A"/>
+                </a:solidFill>
+                <a:latin typeface="Meiryo"/>
+              </a:rPr>
+              <a:t>② 現在の処方患者11,280人に対する率</a:t>
+            </a:r>
+          </a:p>
+          <a:p>
+            <a:pPr algn="l">
+              <a:spcAft>
+                <a:spcPts val="200"/>
+              </a:spcAft>
+            </a:pPr>
+            <a:r>
+              <a:rPr sz="1550" b="1">
                 <a:solidFill>
                   <a:srgbClr val="1B1B1B"/>
                 </a:solidFill>
                 <a:latin typeface="Meiryo"/>
               </a:rPr>
-              <a:t>500万円</a:t>
+              <a:t>A案 +0.14% / B案 +0.39%</a:t>
             </a:r>
           </a:p>
         </p:txBody>
@@ -10698,8 +10743,8 @@
         </p:nvSpPr>
         <p:spPr>
           <a:xfrm>
-            <a:off x="8001000" y="2624328"/>
-            <a:ext cx="1371600" cy="502920"/>
+            <a:off x="8001000" y="3675887"/>
+            <a:ext cx="3547872" cy="822960"/>
           </a:xfrm>
           <a:prstGeom prst="rect">
             <a:avLst/>
@@ -10711,18 +10756,38 @@
           <a:effectLst/>
         </p:spPr>
         <p:txBody>
-          <a:bodyPr rtlCol="0" anchor="ctr" wrap="square"/>
-          <a:lstStyle/>
-          <a:p>
-            <a:pPr algn="l"/>
-            <a:r>
-              <a:rPr sz="2000" b="1">
+          <a:bodyPr rtlCol="0" anchor="t" wrap="square"/>
+          <a:lstStyle/>
+          <a:p>
+            <a:pPr algn="l">
+              <a:spcAft>
+                <a:spcPts val="200"/>
+              </a:spcAft>
+            </a:pPr>
+            <a:r>
+              <a:rPr sz="1250" b="0">
+                <a:solidFill>
+                  <a:srgbClr val="5F6B7A"/>
+                </a:solidFill>
+                <a:latin typeface="Meiryo"/>
+              </a:rPr>
+              <a:t>③ × 年間売上50億円</a:t>
+            </a:r>
+          </a:p>
+          <a:p>
+            <a:pPr algn="l">
+              <a:spcAft>
+                <a:spcPts val="200"/>
+              </a:spcAft>
+            </a:pPr>
+            <a:r>
+              <a:rPr sz="1550" b="1">
                 <a:solidFill>
                   <a:srgbClr val="E8602C"/>
                 </a:solidFill>
                 <a:latin typeface="Meiryo"/>
               </a:rPr>
-              <a:t>+0.3%</a:t>
+              <a:t>A案 +722万円 / B案 +1,954万円</a:t>
             </a:r>
           </a:p>
         </p:txBody>
@@ -10735,8 +10800,8 @@
         </p:nvSpPr>
         <p:spPr>
           <a:xfrm>
-            <a:off x="9372600" y="2624328"/>
-            <a:ext cx="2103120" cy="502920"/>
+            <a:off x="8001000" y="4553712"/>
+            <a:ext cx="3547872" cy="777240"/>
           </a:xfrm>
           <a:prstGeom prst="rect">
             <a:avLst/>
@@ -10748,18 +10813,30 @@
           <a:effectLst/>
         </p:spPr>
         <p:txBody>
-          <a:bodyPr rtlCol="0" anchor="ctr" wrap="square"/>
+          <a:bodyPr rtlCol="0" anchor="t" wrap="square"/>
           <a:lstStyle/>
           <a:p>
             <a:pPr algn="l"/>
             <a:r>
-              <a:rPr sz="2000" b="1">
-                <a:solidFill>
-                  <a:srgbClr val="1B1B1B"/>
+              <a:rPr sz="1250" b="1">
+                <a:solidFill>
+                  <a:srgbClr val="0B2A5B"/>
                 </a:solidFill>
                 <a:latin typeface="Meiryo"/>
               </a:rPr>
-              <a:t>1,500万円</a:t>
+              <a:t>幅(保守〜楽観): A案 241〜1,444万円</a:t>
+            </a:r>
+          </a:p>
+          <a:p>
+            <a:pPr algn="l"/>
+            <a:r>
+              <a:rPr sz="1250" b="1">
+                <a:solidFill>
+                  <a:srgbClr val="0B2A5B"/>
+                </a:solidFill>
+                <a:latin typeface="Meiryo"/>
+              </a:rPr>
+              <a:t>B案 651〜3,908万円</a:t>
             </a:r>
           </a:p>
         </p:txBody>
@@ -10767,191 +10844,6 @@
       <p:sp>
         <p:nvSpPr>
           <p:cNvPr id="16" name="Rectangle 15"/>
-          <p:cNvSpPr/>
-          <p:nvPr/>
-        </p:nvSpPr>
-        <p:spPr>
-          <a:xfrm>
-            <a:off x="8001000" y="3191256"/>
-            <a:ext cx="1371600" cy="502920"/>
-          </a:xfrm>
-          <a:prstGeom prst="rect">
-            <a:avLst/>
-          </a:prstGeom>
-          <a:noFill/>
-          <a:ln>
-            <a:noFill/>
-          </a:ln>
-          <a:effectLst/>
-        </p:spPr>
-        <p:txBody>
-          <a:bodyPr rtlCol="0" anchor="ctr" wrap="square"/>
-          <a:lstStyle/>
-          <a:p>
-            <a:pPr algn="l"/>
-            <a:r>
-              <a:rPr sz="2000" b="1">
-                <a:solidFill>
-                  <a:srgbClr val="E8602C"/>
-                </a:solidFill>
-                <a:latin typeface="Meiryo"/>
-              </a:rPr>
-              <a:t>+0.5%</a:t>
-            </a:r>
-          </a:p>
-        </p:txBody>
-      </p:sp>
-      <p:sp>
-        <p:nvSpPr>
-          <p:cNvPr id="17" name="Rectangle 16"/>
-          <p:cNvSpPr/>
-          <p:nvPr/>
-        </p:nvSpPr>
-        <p:spPr>
-          <a:xfrm>
-            <a:off x="9372600" y="3191256"/>
-            <a:ext cx="2103120" cy="502920"/>
-          </a:xfrm>
-          <a:prstGeom prst="rect">
-            <a:avLst/>
-          </a:prstGeom>
-          <a:noFill/>
-          <a:ln>
-            <a:noFill/>
-          </a:ln>
-          <a:effectLst/>
-        </p:spPr>
-        <p:txBody>
-          <a:bodyPr rtlCol="0" anchor="ctr" wrap="square"/>
-          <a:lstStyle/>
-          <a:p>
-            <a:pPr algn="l"/>
-            <a:r>
-              <a:rPr sz="2000" b="1">
-                <a:solidFill>
-                  <a:srgbClr val="1B1B1B"/>
-                </a:solidFill>
-                <a:latin typeface="Meiryo"/>
-              </a:rPr>
-              <a:t>2,500万円</a:t>
-            </a:r>
-          </a:p>
-        </p:txBody>
-      </p:sp>
-      <p:sp>
-        <p:nvSpPr>
-          <p:cNvPr id="18" name="Rectangle 17"/>
-          <p:cNvSpPr/>
-          <p:nvPr/>
-        </p:nvSpPr>
-        <p:spPr>
-          <a:xfrm>
-            <a:off x="8001000" y="3758183"/>
-            <a:ext cx="1371600" cy="502920"/>
-          </a:xfrm>
-          <a:prstGeom prst="rect">
-            <a:avLst/>
-          </a:prstGeom>
-          <a:noFill/>
-          <a:ln>
-            <a:noFill/>
-          </a:ln>
-          <a:effectLst/>
-        </p:spPr>
-        <p:txBody>
-          <a:bodyPr rtlCol="0" anchor="ctr" wrap="square"/>
-          <a:lstStyle/>
-          <a:p>
-            <a:pPr algn="l"/>
-            <a:r>
-              <a:rPr sz="2000" b="1">
-                <a:solidFill>
-                  <a:srgbClr val="E8602C"/>
-                </a:solidFill>
-                <a:latin typeface="Meiryo"/>
-              </a:rPr>
-              <a:t>+1.0%</a:t>
-            </a:r>
-          </a:p>
-        </p:txBody>
-      </p:sp>
-      <p:sp>
-        <p:nvSpPr>
-          <p:cNvPr id="19" name="Rectangle 18"/>
-          <p:cNvSpPr/>
-          <p:nvPr/>
-        </p:nvSpPr>
-        <p:spPr>
-          <a:xfrm>
-            <a:off x="9372600" y="3758183"/>
-            <a:ext cx="2103120" cy="502920"/>
-          </a:xfrm>
-          <a:prstGeom prst="rect">
-            <a:avLst/>
-          </a:prstGeom>
-          <a:noFill/>
-          <a:ln>
-            <a:noFill/>
-          </a:ln>
-          <a:effectLst/>
-        </p:spPr>
-        <p:txBody>
-          <a:bodyPr rtlCol="0" anchor="ctr" wrap="square"/>
-          <a:lstStyle/>
-          <a:p>
-            <a:pPr algn="l"/>
-            <a:r>
-              <a:rPr sz="2000" b="1">
-                <a:solidFill>
-                  <a:srgbClr val="1B1B1B"/>
-                </a:solidFill>
-                <a:latin typeface="Meiryo"/>
-              </a:rPr>
-              <a:t>5,000万円</a:t>
-            </a:r>
-          </a:p>
-        </p:txBody>
-      </p:sp>
-      <p:sp>
-        <p:nvSpPr>
-          <p:cNvPr id="20" name="Rectangle 19"/>
-          <p:cNvSpPr/>
-          <p:nvPr/>
-        </p:nvSpPr>
-        <p:spPr>
-          <a:xfrm>
-            <a:off x="8001000" y="4343400"/>
-            <a:ext cx="3547872" cy="1005840"/>
-          </a:xfrm>
-          <a:prstGeom prst="rect">
-            <a:avLst/>
-          </a:prstGeom>
-          <a:noFill/>
-          <a:ln>
-            <a:noFill/>
-          </a:ln>
-          <a:effectLst/>
-        </p:spPr>
-        <p:txBody>
-          <a:bodyPr rtlCol="0" anchor="t" wrap="square"/>
-          <a:lstStyle/>
-          <a:p>
-            <a:pPr algn="l"/>
-            <a:r>
-              <a:rPr sz="1200" b="0">
-                <a:solidFill>
-                  <a:srgbClr val="5F6B7A"/>
-                </a:solidFill>
-                <a:latin typeface="Meiryo"/>
-              </a:rPr>
-              <a:t>年間売上50億円 × 増加率。方法A(A案・基準208万円)とは別の計算</a:t>
-            </a:r>
-          </a:p>
-        </p:txBody>
-      </p:sp>
-      <p:sp>
-        <p:nvSpPr>
-          <p:cNvPr id="21" name="Rectangle 20"/>
           <p:cNvSpPr/>
           <p:nvPr/>
         </p:nvSpPr>

--- a/final_deliverables/v6/20261009_最終発表_v6.pptx
+++ b/final_deliverables/v6/20261009_最終発表_v6.pptx
@@ -2651,7 +2651,7 @@
           </a:p>
           <a:p>
             <a:r>
-              <a:t>また重点医師は、処方の多い類似医師に比べてMR面談が少なく、17%対51%です。差は関連ですが、MRが届かない分をMR君で補う理由になります。</a:t>
+              <a:t>また、MR面談を受けている医師は、重点医師では17%だけで、同じ診療科・患者数・施設区分で処方の多い医師では51%です。重点医師はMRに会えていないので、MR君で補います。</a:t>
             </a:r>
           </a:p>
         </p:txBody>
@@ -2731,7 +2731,7 @@
           </a:p>
           <a:p>
             <a:r>
-              <a:t>財源は、潜在0〜2人の医師993名の配信を隔月にして生み出します。費用は年6.7万円下がり、予算は増やしません。</a:t>
+              <a:t>財源は、潜在0〜2人の医師993名の配信を隔月にして生み出します。費用は年6.7万円下がり、予算は増やしません。浮いた予算は、MR面談の強化にも回せます。MR面談がある医師は処方率が4.1ポイント高いという関連があるため、MRの訪問先も重点医師に寄せることを提案します。</a:t>
             </a:r>
           </a:p>
         </p:txBody>
@@ -8246,7 +8246,7 @@
                 </a:solidFill>
                 <a:latin typeface="Meiryo"/>
               </a:rPr>
-              <a:t>MR面談がある医師の割合</a:t>
+              <a:t>MR面談を受けている医師の割合</a:t>
             </a:r>
           </a:p>
           <a:p>
@@ -8262,7 +8262,7 @@
                 </a:solidFill>
                 <a:latin typeface="Meiryo"/>
               </a:rPr>
-              <a:t>重点医師 vs 処方の多い類似医師</a:t>
+              <a:t>重点医師17%</a:t>
             </a:r>
           </a:p>
           <a:p>
@@ -8278,7 +8278,23 @@
                 </a:solidFill>
                 <a:latin typeface="Meiryo"/>
               </a:rPr>
-              <a:t>→ MRが届かない分をMR君で補う</a:t>
+              <a:t>処方の多い類似医師51%(同じ診療科・患者数・施設区分)</a:t>
+            </a:r>
+          </a:p>
+          <a:p>
+            <a:pPr algn="l">
+              <a:spcAft>
+                <a:spcPts val="400"/>
+              </a:spcAft>
+            </a:pPr>
+            <a:r>
+              <a:rPr sz="1300" b="0">
+                <a:solidFill>
+                  <a:srgbClr val="5F6B7A"/>
+                </a:solidFill>
+                <a:latin typeface="Meiryo"/>
+              </a:rPr>
+              <a:t>→ 重点医師はMRに会えていない。MR君で補う</a:t>
             </a:r>
           </a:p>
         </p:txBody>
@@ -8484,7 +8500,7 @@
                 </a:solidFill>
                 <a:latin typeface="Meiryo"/>
               </a:rPr>
-              <a:t>回答医師5,000名での設計。12回 = 10本 + 未読の上位コンテンツの再配信2回。MR面談がある重点医師は現状維持。前提: 新規配信先の配信資格・同意(未確認)。</a:t>
+              <a:t>回答医師5,000名での設計。12回 = 10本 + 未読の上位コンテンツの再配信2回。+4.1pt = 内科・耳鼻・患者8人以上の重回帰(因果ではない)。MRの訪問費用はデータになし。</a:t>
             </a:r>
           </a:p>
         </p:txBody>
@@ -8650,7 +8666,7 @@
         <p:spPr>
           <a:xfrm>
             <a:off x="8001000" y="1600200"/>
-            <a:ext cx="3547872" cy="1737360"/>
+            <a:ext cx="3547872" cy="1188720"/>
           </a:xfrm>
           <a:prstGeom prst="rect">
             <a:avLst/>
@@ -8686,8 +8702,8 @@
         </p:nvSpPr>
         <p:spPr>
           <a:xfrm>
-            <a:off x="8001000" y="3383280"/>
-            <a:ext cx="3547872" cy="1874519"/>
+            <a:off x="8001000" y="2834640"/>
+            <a:ext cx="3547872" cy="1005839"/>
           </a:xfrm>
           <a:prstGeom prst="rect">
             <a:avLst/>
@@ -8759,6 +8775,79 @@
         </p:nvSpPr>
         <p:spPr>
           <a:xfrm>
+            <a:off x="8001000" y="3931919"/>
+            <a:ext cx="3547872" cy="1371600"/>
+          </a:xfrm>
+          <a:prstGeom prst="rect">
+            <a:avLst/>
+          </a:prstGeom>
+          <a:noFill/>
+          <a:ln>
+            <a:noFill/>
+          </a:ln>
+          <a:effectLst/>
+        </p:spPr>
+        <p:txBody>
+          <a:bodyPr rtlCol="0" anchor="t" wrap="square"/>
+          <a:lstStyle/>
+          <a:p>
+            <a:pPr algn="l">
+              <a:spcAft>
+                <a:spcPts val="200"/>
+              </a:spcAft>
+            </a:pPr>
+            <a:r>
+              <a:rPr sz="1250" b="1">
+                <a:solidFill>
+                  <a:srgbClr val="0B2A5B"/>
+                </a:solidFill>
+                <a:latin typeface="Meiryo"/>
+              </a:rPr>
+              <a:t>浮いた予算はMR面談の強化にも</a:t>
+            </a:r>
+          </a:p>
+          <a:p>
+            <a:pPr algn="l">
+              <a:spcAft>
+                <a:spcPts val="200"/>
+              </a:spcAft>
+            </a:pPr>
+            <a:r>
+              <a:rPr sz="1250" b="0">
+                <a:solidFill>
+                  <a:srgbClr val="1B1B1B"/>
+                </a:solidFill>
+                <a:latin typeface="Meiryo"/>
+              </a:rPr>
+              <a:t>MR面談がある医師は処方率が+4.1pt高い(関連)</a:t>
+            </a:r>
+          </a:p>
+          <a:p>
+            <a:pPr algn="l">
+              <a:spcAft>
+                <a:spcPts val="200"/>
+              </a:spcAft>
+            </a:pPr>
+            <a:r>
+              <a:rPr sz="1250" b="0">
+                <a:solidFill>
+                  <a:srgbClr val="1B1B1B"/>
+                </a:solidFill>
+                <a:latin typeface="Meiryo"/>
+              </a:rPr>
+              <a:t>→ MRの訪問先も重点医師に寄せる</a:t>
+            </a:r>
+          </a:p>
+        </p:txBody>
+      </p:sp>
+      <p:sp>
+        <p:nvSpPr>
+          <p:cNvPr id="14" name="Rectangle 13"/>
+          <p:cNvSpPr/>
+          <p:nvPr/>
+        </p:nvSpPr>
+        <p:spPr>
+          <a:xfrm>
             <a:off x="502920" y="5596128"/>
             <a:ext cx="11183112" cy="566928"/>
           </a:xfrm>
@@ -8785,7 +8874,7 @@
                 </a:solidFill>
                 <a:latin typeface="Meiryo"/>
               </a:rPr>
-              <a:t>→ 予算を増やさずに、潜在患者の多い医師へ配信を移す</a:t>
+              <a:t>→ 予算を増やさずに配信を移し、浮いた予算はMR面談の強化に回せる</a:t>
             </a:r>
           </a:p>
         </p:txBody>
